--- a/curriculum/M02/W07/L03/slides.pptx
+++ b/curriculum/M02/W07/L03/slides.pptx
@@ -5714,11 +5714,40 @@
                 <a:ea typeface="Malgun Gothic"/>
                 <a:cs typeface="Malgun Gothic"/>
               </a:rPr>
-              <a:t>가 alpha와 beta 탄소 사이에 이중결합을 만들어 trans-Δ²-enoyl-CoA를 만들고 FAD를 FADH₂로 환원한다. 2. </a:t>
-            </a:r>
+              <a:t>가 alpha와 beta 탄소 사이에 이중결합을 만들어 trans-Δ²-enoyl-CoA를 만들고 FAD를 FADH₂로 환원한다.</a:t>
+            </a:r>
+          </a:p>
+          <a:p>
+            <a:pPr>
+              <a:spcAft>
+                <a:spcPts val="900"/>
+              </a:spcAft>
+            </a:pPr>
             <a:r>
               <a:rPr sz="1600" b="1" i="0">
                 <a:solidFill>
+                  <a:srgbClr val="F2B705"/>
+                </a:solidFill>
+                <a:latin typeface="Malgun Gothic"/>
+                <a:ea typeface="Malgun Gothic"/>
+                <a:cs typeface="Malgun Gothic"/>
+              </a:rPr>
+              <a:t>•  </a:t>
+            </a:r>
+            <a:r>
+              <a:rPr sz="1600" b="0" i="0">
+                <a:solidFill>
+                  <a:srgbClr val="11202B"/>
+                </a:solidFill>
+                <a:latin typeface="Malgun Gothic"/>
+                <a:ea typeface="Malgun Gothic"/>
+                <a:cs typeface="Malgun Gothic"/>
+              </a:rPr>
+              <a:t>2. </a:t>
+            </a:r>
+            <a:r>
+              <a:rPr sz="1600" b="1" i="0">
+                <a:solidFill>
                   <a:srgbClr val="11202B"/>
                 </a:solidFill>
                 <a:latin typeface="Malgun Gothic"/>
@@ -5780,11 +5809,40 @@
                 <a:ea typeface="Malgun Gothic"/>
                 <a:cs typeface="Malgun Gothic"/>
               </a:rPr>
-              <a:t>인 점이 합성 경로의 D형 중간체와 다르다. 3. </a:t>
-            </a:r>
+              <a:t>인 점이 합성 경로의 D형 중간체와 다르다.</a:t>
+            </a:r>
+          </a:p>
+          <a:p>
+            <a:pPr>
+              <a:spcAft>
+                <a:spcPts val="900"/>
+              </a:spcAft>
+            </a:pPr>
             <a:r>
               <a:rPr sz="1600" b="1" i="0">
                 <a:solidFill>
+                  <a:srgbClr val="F2B705"/>
+                </a:solidFill>
+                <a:latin typeface="Malgun Gothic"/>
+                <a:ea typeface="Malgun Gothic"/>
+                <a:cs typeface="Malgun Gothic"/>
+              </a:rPr>
+              <a:t>•  </a:t>
+            </a:r>
+            <a:r>
+              <a:rPr sz="1600" b="0" i="0">
+                <a:solidFill>
+                  <a:srgbClr val="11202B"/>
+                </a:solidFill>
+                <a:latin typeface="Malgun Gothic"/>
+                <a:ea typeface="Malgun Gothic"/>
+                <a:cs typeface="Malgun Gothic"/>
+              </a:rPr>
+              <a:t>3. </a:t>
+            </a:r>
+            <a:r>
+              <a:rPr sz="1600" b="1" i="0">
+                <a:solidFill>
                   <a:srgbClr val="11202B"/>
                 </a:solidFill>
                 <a:latin typeface="Malgun Gothic"/>
@@ -5824,7 +5882,36 @@
                 <a:ea typeface="Malgun Gothic"/>
                 <a:cs typeface="Malgun Gothic"/>
               </a:rPr>
-              <a:t>가 hydroxyl기를 keto기로 산화하고 NAD⁺를 NADH로 환원한다. 4. </a:t>
+              <a:t>가 hydroxyl기를 keto기로 산화하고 NAD⁺를 NADH로 환원한다.</a:t>
+            </a:r>
+          </a:p>
+          <a:p>
+            <a:pPr>
+              <a:spcAft>
+                <a:spcPts val="900"/>
+              </a:spcAft>
+            </a:pPr>
+            <a:r>
+              <a:rPr sz="1600" b="1" i="0">
+                <a:solidFill>
+                  <a:srgbClr val="F2B705"/>
+                </a:solidFill>
+                <a:latin typeface="Malgun Gothic"/>
+                <a:ea typeface="Malgun Gothic"/>
+                <a:cs typeface="Malgun Gothic"/>
+              </a:rPr>
+              <a:t>•  </a:t>
+            </a:r>
+            <a:r>
+              <a:rPr sz="1600" b="0" i="0">
+                <a:solidFill>
+                  <a:srgbClr val="11202B"/>
+                </a:solidFill>
+                <a:latin typeface="Malgun Gothic"/>
+                <a:ea typeface="Malgun Gothic"/>
+                <a:cs typeface="Malgun Gothic"/>
+              </a:rPr>
+              <a:t>4. </a:t>
             </a:r>
             <a:r>
               <a:rPr sz="1600" b="1" i="0">
@@ -7487,7 +7574,65 @@
                 <a:ea typeface="Malgun Gothic"/>
                 <a:cs typeface="Malgun Gothic"/>
               </a:rPr>
-              <a:t>(biotin, ATP)가 CO₂를 붙여 D-methylmalonyl-CoA를 만든다. 2. Racemase가 L형으로 바꾼다. 3. </a:t>
+              <a:t>(biotin, ATP)가 CO₂를 붙여 D-methylmalonyl-CoA를 만든다.</a:t>
+            </a:r>
+          </a:p>
+          <a:p>
+            <a:pPr>
+              <a:spcAft>
+                <a:spcPts val="900"/>
+              </a:spcAft>
+            </a:pPr>
+            <a:r>
+              <a:rPr sz="1400" b="1" i="0">
+                <a:solidFill>
+                  <a:srgbClr val="F2B705"/>
+                </a:solidFill>
+                <a:latin typeface="Malgun Gothic"/>
+                <a:ea typeface="Malgun Gothic"/>
+                <a:cs typeface="Malgun Gothic"/>
+              </a:rPr>
+              <a:t>•  </a:t>
+            </a:r>
+            <a:r>
+              <a:rPr sz="1400" b="0" i="0">
+                <a:solidFill>
+                  <a:srgbClr val="11202B"/>
+                </a:solidFill>
+                <a:latin typeface="Malgun Gothic"/>
+                <a:ea typeface="Malgun Gothic"/>
+                <a:cs typeface="Malgun Gothic"/>
+              </a:rPr>
+              <a:t>2. Racemase가 L형으로 바꾼다.</a:t>
+            </a:r>
+          </a:p>
+          <a:p>
+            <a:pPr>
+              <a:spcAft>
+                <a:spcPts val="900"/>
+              </a:spcAft>
+            </a:pPr>
+            <a:r>
+              <a:rPr sz="1400" b="1" i="0">
+                <a:solidFill>
+                  <a:srgbClr val="F2B705"/>
+                </a:solidFill>
+                <a:latin typeface="Malgun Gothic"/>
+                <a:ea typeface="Malgun Gothic"/>
+                <a:cs typeface="Malgun Gothic"/>
+              </a:rPr>
+              <a:t>•  </a:t>
+            </a:r>
+            <a:r>
+              <a:rPr sz="1400" b="0" i="0">
+                <a:solidFill>
+                  <a:srgbClr val="11202B"/>
+                </a:solidFill>
+                <a:latin typeface="Malgun Gothic"/>
+                <a:ea typeface="Malgun Gothic"/>
+                <a:cs typeface="Malgun Gothic"/>
+              </a:rPr>
+              <a:t>3. </a:t>
             </a:r>
             <a:r>
               <a:rPr sz="1400" b="1" i="0">
@@ -19598,7 +19743,7 @@
               </a:spcAft>
             </a:pPr>
             <a:r>
-              <a:rPr sz="1600" b="1" i="0">
+              <a:rPr sz="1400" b="1" i="0">
                 <a:solidFill>
                   <a:srgbClr val="F2B705"/>
                 </a:solidFill>
@@ -19609,7 +19754,7 @@
               <a:t>•  </a:t>
             </a:r>
             <a:r>
-              <a:rPr sz="1600" b="0" i="0">
+              <a:rPr sz="1400" b="0" i="0">
                 <a:solidFill>
                   <a:srgbClr val="11202B"/>
                 </a:solidFill>
@@ -19620,7 +19765,7 @@
               <a:t>세포 안으로 들어온 지방산은 그대로는 반응하지 않는다. 먼저 </a:t>
             </a:r>
             <a:r>
-              <a:rPr sz="1600" b="1" i="0">
+              <a:rPr sz="1400" b="1" i="0">
                 <a:solidFill>
                   <a:srgbClr val="11202B"/>
                 </a:solidFill>
@@ -19631,7 +19776,7 @@
               <a:t>활성화</a:t>
             </a:r>
             <a:r>
-              <a:rPr sz="1600" b="0" i="0">
+              <a:rPr sz="1400" b="0" i="0">
                 <a:solidFill>
                   <a:srgbClr val="11202B"/>
                 </a:solidFill>
@@ -19649,7 +19794,7 @@
               </a:spcAft>
             </a:pPr>
             <a:r>
-              <a:rPr sz="1600" b="1" i="0">
+              <a:rPr sz="1400" b="1" i="0">
                 <a:solidFill>
                   <a:srgbClr val="F2B705"/>
                 </a:solidFill>
@@ -19660,7 +19805,7 @@
               <a:t>•  </a:t>
             </a:r>
             <a:r>
-              <a:rPr sz="1600" b="1" i="0">
+              <a:rPr sz="1400" b="1" i="0">
                 <a:solidFill>
                   <a:srgbClr val="11202B"/>
                 </a:solidFill>
@@ -19671,7 +19816,7 @@
               <a:t>Acyl-CoA synthetase</a:t>
             </a:r>
             <a:r>
-              <a:rPr sz="1600" b="0" i="0">
+              <a:rPr sz="1400" b="0" i="0">
                 <a:solidFill>
                   <a:srgbClr val="11202B"/>
                 </a:solidFill>
@@ -19682,7 +19827,7 @@
               <a:t>(fatty acyl-CoA ligase)가 지방산의 carboxyl기에 CoA를 붙여 </a:t>
             </a:r>
             <a:r>
-              <a:rPr sz="1600" b="1" i="0">
+              <a:rPr sz="1400" b="1" i="0">
                 <a:solidFill>
                   <a:srgbClr val="11202B"/>
                 </a:solidFill>
@@ -19693,7 +19838,7 @@
               <a:t>fatty acyl-CoA</a:t>
             </a:r>
             <a:r>
-              <a:rPr sz="1600" b="0" i="0">
+              <a:rPr sz="1400" b="0" i="0">
                 <a:solidFill>
                   <a:srgbClr val="11202B"/>
                 </a:solidFill>
@@ -19704,7 +19849,7 @@
               <a:t>를 만든다. 이 반응은 ATP를 AMP와 pyrophosphate로 가르므로 고에너지 결합 </a:t>
             </a:r>
             <a:r>
-              <a:rPr sz="1600" b="1" i="0">
+              <a:rPr sz="1400" b="1" i="0">
                 <a:solidFill>
                   <a:srgbClr val="11202B"/>
                 </a:solidFill>
@@ -19715,7 +19860,7 @@
               <a:t>두 개</a:t>
             </a:r>
             <a:r>
-              <a:rPr sz="1600" b="0" i="0">
+              <a:rPr sz="1400" b="0" i="0">
                 <a:solidFill>
                   <a:srgbClr val="11202B"/>
                 </a:solidFill>
@@ -19733,7 +19878,7 @@
               </a:spcAft>
             </a:pPr>
             <a:r>
-              <a:rPr sz="1600" b="1" i="0">
+              <a:rPr sz="1400" b="1" i="0">
                 <a:solidFill>
                   <a:srgbClr val="F2B705"/>
                 </a:solidFill>
@@ -19744,7 +19889,7 @@
               <a:t>•  </a:t>
             </a:r>
             <a:r>
-              <a:rPr sz="1600" b="0" i="0">
+              <a:rPr sz="1400" b="0" i="0">
                 <a:solidFill>
                   <a:srgbClr val="11202B"/>
                 </a:solidFill>
@@ -19755,7 +19900,7 @@
               <a:t>문제는 다음이다. 활성화는 세포질에서 일어나는데 beta-oxidation 효소는 </a:t>
             </a:r>
             <a:r>
-              <a:rPr sz="1600" b="1" i="0">
+              <a:rPr sz="1400" b="1" i="0">
                 <a:solidFill>
                   <a:srgbClr val="11202B"/>
                 </a:solidFill>
@@ -19766,7 +19911,7 @@
               <a:t>미토콘드리아 기질</a:t>
             </a:r>
             <a:r>
-              <a:rPr sz="1600" b="0" i="0">
+              <a:rPr sz="1400" b="0" i="0">
                 <a:solidFill>
                   <a:srgbClr val="11202B"/>
                 </a:solidFill>
@@ -19777,7 +19922,7 @@
               <a:t>에 있고, 긴 사슬 acyl-CoA는 내막을 통과하지 못한다. 이 문제를 </a:t>
             </a:r>
             <a:r>
-              <a:rPr sz="1600" b="1" i="0">
+              <a:rPr sz="1400" b="1" i="0">
                 <a:solidFill>
                   <a:srgbClr val="11202B"/>
                 </a:solidFill>
@@ -19788,7 +19933,7 @@
               <a:t>carnitine shuttle</a:t>
             </a:r>
             <a:r>
-              <a:rPr sz="1600" b="0" i="0">
+              <a:rPr sz="1400" b="0" i="0">
                 <a:solidFill>
                   <a:srgbClr val="11202B"/>
                 </a:solidFill>
@@ -19806,7 +19951,7 @@
               </a:spcAft>
             </a:pPr>
             <a:r>
-              <a:rPr sz="1600" b="1" i="0">
+              <a:rPr sz="1400" b="1" i="0">
                 <a:solidFill>
                   <a:srgbClr val="F2B705"/>
                 </a:solidFill>
@@ -19817,7 +19962,7 @@
               <a:t>•  </a:t>
             </a:r>
             <a:r>
-              <a:rPr sz="1600" b="1" i="0">
+              <a:rPr sz="1400" b="1" i="0">
                 <a:solidFill>
                   <a:srgbClr val="11202B"/>
                 </a:solidFill>
@@ -19828,7 +19973,7 @@
               <a:t>Carnitine</a:t>
             </a:r>
             <a:r>
-              <a:rPr sz="1600" b="0" i="0">
+              <a:rPr sz="1400" b="0" i="0">
                 <a:solidFill>
                   <a:srgbClr val="11202B"/>
                 </a:solidFill>
@@ -19846,7 +19991,7 @@
               </a:spcAft>
             </a:pPr>
             <a:r>
-              <a:rPr sz="1600" b="1" i="0">
+              <a:rPr sz="1400" b="1" i="0">
                 <a:solidFill>
                   <a:srgbClr val="F2B705"/>
                 </a:solidFill>
@@ -19857,7 +20002,7 @@
               <a:t>•  </a:t>
             </a:r>
             <a:r>
-              <a:rPr sz="1600" b="0" i="0">
+              <a:rPr sz="1400" b="0" i="0">
                 <a:solidFill>
                   <a:srgbClr val="11202B"/>
                 </a:solidFill>
@@ -19866,6 +20011,130 @@
                 <a:cs typeface="Malgun Gothic"/>
               </a:rPr>
               <a:t>셔틀은 세 요소로 구성된다.</a:t>
+            </a:r>
+          </a:p>
+          <a:p>
+            <a:pPr>
+              <a:spcAft>
+                <a:spcPts val="900"/>
+              </a:spcAft>
+            </a:pPr>
+            <a:r>
+              <a:rPr sz="1400" b="1" i="0">
+                <a:solidFill>
+                  <a:srgbClr val="F2B705"/>
+                </a:solidFill>
+                <a:latin typeface="Malgun Gothic"/>
+                <a:ea typeface="Malgun Gothic"/>
+                <a:cs typeface="Malgun Gothic"/>
+              </a:rPr>
+              <a:t>•  </a:t>
+            </a:r>
+            <a:r>
+              <a:rPr sz="1400" b="0" i="0">
+                <a:solidFill>
+                  <a:srgbClr val="11202B"/>
+                </a:solidFill>
+                <a:latin typeface="Malgun Gothic"/>
+                <a:ea typeface="Malgun Gothic"/>
+                <a:cs typeface="Malgun Gothic"/>
+              </a:rPr>
+              <a:t>1. </a:t>
+            </a:r>
+            <a:r>
+              <a:rPr sz="1400" b="1" i="0">
+                <a:solidFill>
+                  <a:srgbClr val="11202B"/>
+                </a:solidFill>
+                <a:latin typeface="Malgun Gothic"/>
+                <a:ea typeface="Malgun Gothic"/>
+                <a:cs typeface="Malgun Gothic"/>
+              </a:rPr>
+              <a:t>CPT-I</a:t>
+            </a:r>
+            <a:r>
+              <a:rPr sz="1400" b="0" i="0">
+                <a:solidFill>
+                  <a:srgbClr val="11202B"/>
+                </a:solidFill>
+                <a:latin typeface="Malgun Gothic"/>
+                <a:ea typeface="Malgun Gothic"/>
+                <a:cs typeface="Malgun Gothic"/>
+              </a:rPr>
+              <a:t>(carnitine palmitoyltransferase I) — 외막에 있다. Acyl-CoA의 acyl기를 carnitine에 옮겨 </a:t>
+            </a:r>
+            <a:r>
+              <a:rPr sz="1400" b="1" i="0">
+                <a:solidFill>
+                  <a:srgbClr val="11202B"/>
+                </a:solidFill>
+                <a:latin typeface="Malgun Gothic"/>
+                <a:ea typeface="Malgun Gothic"/>
+                <a:cs typeface="Malgun Gothic"/>
+              </a:rPr>
+              <a:t>acylcarnitine</a:t>
+            </a:r>
+            <a:r>
+              <a:rPr sz="1400" b="0" i="0">
+                <a:solidFill>
+                  <a:srgbClr val="11202B"/>
+                </a:solidFill>
+                <a:latin typeface="Malgun Gothic"/>
+                <a:ea typeface="Malgun Gothic"/>
+                <a:cs typeface="Malgun Gothic"/>
+              </a:rPr>
+              <a:t>을 만들고 CoA를 세포질에 돌려준다.</a:t>
+            </a:r>
+          </a:p>
+          <a:p>
+            <a:pPr>
+              <a:spcAft>
+                <a:spcPts val="900"/>
+              </a:spcAft>
+            </a:pPr>
+            <a:r>
+              <a:rPr sz="1400" b="1" i="0">
+                <a:solidFill>
+                  <a:srgbClr val="F2B705"/>
+                </a:solidFill>
+                <a:latin typeface="Malgun Gothic"/>
+                <a:ea typeface="Malgun Gothic"/>
+                <a:cs typeface="Malgun Gothic"/>
+              </a:rPr>
+              <a:t>•  </a:t>
+            </a:r>
+            <a:r>
+              <a:rPr sz="1400" b="0" i="0">
+                <a:solidFill>
+                  <a:srgbClr val="11202B"/>
+                </a:solidFill>
+                <a:latin typeface="Malgun Gothic"/>
+                <a:ea typeface="Malgun Gothic"/>
+                <a:cs typeface="Malgun Gothic"/>
+              </a:rPr>
+              <a:t>2. </a:t>
+            </a:r>
+            <a:r>
+              <a:rPr sz="1400" b="1" i="0">
+                <a:solidFill>
+                  <a:srgbClr val="11202B"/>
+                </a:solidFill>
+                <a:latin typeface="Malgun Gothic"/>
+                <a:ea typeface="Malgun Gothic"/>
+                <a:cs typeface="Malgun Gothic"/>
+              </a:rPr>
+              <a:t>CACT</a:t>
+            </a:r>
+            <a:r>
+              <a:rPr sz="1400" b="0" i="0">
+                <a:solidFill>
+                  <a:srgbClr val="11202B"/>
+                </a:solidFill>
+                <a:latin typeface="Malgun Gothic"/>
+                <a:ea typeface="Malgun Gothic"/>
+                <a:cs typeface="Malgun Gothic"/>
+              </a:rPr>
+              <a:t>(carnitine-acylcarnitine translocase) — 내막에 있는 역수송체다. Acylcarnitine을 안으로 들이고 유리 carnitine을 밖으로 내보낸다.</a:t>
             </a:r>
           </a:p>
         </p:txBody>
@@ -20142,7 +20411,7 @@
               </a:spcAft>
             </a:pPr>
             <a:r>
-              <a:rPr sz="1800" b="1" i="0">
+              <a:rPr sz="2000" b="1" i="0">
                 <a:solidFill>
                   <a:srgbClr val="F2B705"/>
                 </a:solidFill>
@@ -20153,84 +20422,18 @@
               <a:t>•  </a:t>
             </a:r>
             <a:r>
-              <a:rPr sz="1800" b="0" i="0">
-                <a:solidFill>
-                  <a:srgbClr val="11202B"/>
-                </a:solidFill>
-                <a:latin typeface="Malgun Gothic"/>
-                <a:ea typeface="Malgun Gothic"/>
-                <a:cs typeface="Malgun Gothic"/>
-              </a:rPr>
-              <a:t>1. </a:t>
-            </a:r>
-            <a:r>
-              <a:rPr sz="1800" b="1" i="0">
-                <a:solidFill>
-                  <a:srgbClr val="11202B"/>
-                </a:solidFill>
-                <a:latin typeface="Malgun Gothic"/>
-                <a:ea typeface="Malgun Gothic"/>
-                <a:cs typeface="Malgun Gothic"/>
-              </a:rPr>
-              <a:t>CPT-I</a:t>
-            </a:r>
-            <a:r>
-              <a:rPr sz="1800" b="0" i="0">
-                <a:solidFill>
-                  <a:srgbClr val="11202B"/>
-                </a:solidFill>
-                <a:latin typeface="Malgun Gothic"/>
-                <a:ea typeface="Malgun Gothic"/>
-                <a:cs typeface="Malgun Gothic"/>
-              </a:rPr>
-              <a:t>(carnitine palmitoyltransferase I) — 외막에 있다. Acyl-CoA의 acyl기를 carnitine에 옮겨 </a:t>
-            </a:r>
-            <a:r>
-              <a:rPr sz="1800" b="1" i="0">
-                <a:solidFill>
-                  <a:srgbClr val="11202B"/>
-                </a:solidFill>
-                <a:latin typeface="Malgun Gothic"/>
-                <a:ea typeface="Malgun Gothic"/>
-                <a:cs typeface="Malgun Gothic"/>
-              </a:rPr>
-              <a:t>acylcarnitine</a:t>
-            </a:r>
-            <a:r>
-              <a:rPr sz="1800" b="0" i="0">
-                <a:solidFill>
-                  <a:srgbClr val="11202B"/>
-                </a:solidFill>
-                <a:latin typeface="Malgun Gothic"/>
-                <a:ea typeface="Malgun Gothic"/>
-                <a:cs typeface="Malgun Gothic"/>
-              </a:rPr>
-              <a:t>을 만들고 CoA를 세포질에 돌려준다. 2. </a:t>
-            </a:r>
-            <a:r>
-              <a:rPr sz="1800" b="1" i="0">
-                <a:solidFill>
-                  <a:srgbClr val="11202B"/>
-                </a:solidFill>
-                <a:latin typeface="Malgun Gothic"/>
-                <a:ea typeface="Malgun Gothic"/>
-                <a:cs typeface="Malgun Gothic"/>
-              </a:rPr>
-              <a:t>CACT</a:t>
-            </a:r>
-            <a:r>
-              <a:rPr sz="1800" b="0" i="0">
-                <a:solidFill>
-                  <a:srgbClr val="11202B"/>
-                </a:solidFill>
-                <a:latin typeface="Malgun Gothic"/>
-                <a:ea typeface="Malgun Gothic"/>
-                <a:cs typeface="Malgun Gothic"/>
-              </a:rPr>
-              <a:t>(carnitine-acylcarnitine translocase) — 내막에 있는 역수송체다. Acylcarnitine을 안으로 들이고 유리 carnitine을 밖으로 내보낸다. 3. </a:t>
-            </a:r>
-            <a:r>
-              <a:rPr sz="1800" b="1" i="0">
+              <a:rPr sz="2000" b="0" i="0">
+                <a:solidFill>
+                  <a:srgbClr val="11202B"/>
+                </a:solidFill>
+                <a:latin typeface="Malgun Gothic"/>
+                <a:ea typeface="Malgun Gothic"/>
+                <a:cs typeface="Malgun Gothic"/>
+              </a:rPr>
+              <a:t>3. </a:t>
+            </a:r>
+            <a:r>
+              <a:rPr sz="2000" b="1" i="0">
                 <a:solidFill>
                   <a:srgbClr val="11202B"/>
                 </a:solidFill>
@@ -20241,7 +20444,7 @@
               <a:t>CPT-II</a:t>
             </a:r>
             <a:r>
-              <a:rPr sz="1800" b="0" i="0">
+              <a:rPr sz="2000" b="0" i="0">
                 <a:solidFill>
                   <a:srgbClr val="11202B"/>
                 </a:solidFill>
